--- a/For System administrators/6. LinuxClient+WindowsAD/Настройка samba_clnts+AD.pptx
+++ b/For System administrators/6. LinuxClient+WindowsAD/Настройка samba_clnts+AD.pptx
@@ -302,7 +302,7 @@
           <a:p>
             <a:fld id="{B4C71EC6-210F-42DE-9C53-41977AD35B3D}" type="datetimeFigureOut">
               <a:rPr lang="ru-RU" smtClean="0"/>
-              <a:t>04.05.2024</a:t>
+              <a:t>17.10.2026</a:t>
             </a:fld>
             <a:endParaRPr lang="ru-RU"/>
           </a:p>
@@ -467,7 +467,7 @@
           <a:p>
             <a:fld id="{B4C71EC6-210F-42DE-9C53-41977AD35B3D}" type="datetimeFigureOut">
               <a:rPr lang="ru-RU" smtClean="0"/>
-              <a:t>04.05.2024</a:t>
+              <a:t>17.10.2026</a:t>
             </a:fld>
             <a:endParaRPr lang="ru-RU"/>
           </a:p>
@@ -642,7 +642,7 @@
           <a:p>
             <a:fld id="{B4C71EC6-210F-42DE-9C53-41977AD35B3D}" type="datetimeFigureOut">
               <a:rPr lang="ru-RU" smtClean="0"/>
-              <a:t>04.05.2024</a:t>
+              <a:t>17.10.2026</a:t>
             </a:fld>
             <a:endParaRPr lang="ru-RU"/>
           </a:p>
@@ -807,7 +807,7 @@
           <a:p>
             <a:fld id="{B4C71EC6-210F-42DE-9C53-41977AD35B3D}" type="datetimeFigureOut">
               <a:rPr lang="ru-RU" smtClean="0"/>
-              <a:t>04.05.2024</a:t>
+              <a:t>17.10.2026</a:t>
             </a:fld>
             <a:endParaRPr lang="ru-RU"/>
           </a:p>
@@ -1048,7 +1048,7 @@
           <a:p>
             <a:fld id="{B4C71EC6-210F-42DE-9C53-41977AD35B3D}" type="datetimeFigureOut">
               <a:rPr lang="ru-RU" smtClean="0"/>
-              <a:t>04.05.2024</a:t>
+              <a:t>17.10.2026</a:t>
             </a:fld>
             <a:endParaRPr lang="ru-RU"/>
           </a:p>
@@ -1331,7 +1331,7 @@
           <a:p>
             <a:fld id="{B4C71EC6-210F-42DE-9C53-41977AD35B3D}" type="datetimeFigureOut">
               <a:rPr lang="ru-RU" smtClean="0"/>
-              <a:t>04.05.2024</a:t>
+              <a:t>17.10.2026</a:t>
             </a:fld>
             <a:endParaRPr lang="ru-RU"/>
           </a:p>
@@ -1748,7 +1748,7 @@
           <a:p>
             <a:fld id="{B4C71EC6-210F-42DE-9C53-41977AD35B3D}" type="datetimeFigureOut">
               <a:rPr lang="ru-RU" smtClean="0"/>
-              <a:t>04.05.2024</a:t>
+              <a:t>17.10.2026</a:t>
             </a:fld>
             <a:endParaRPr lang="ru-RU"/>
           </a:p>
@@ -1861,7 +1861,7 @@
           <a:p>
             <a:fld id="{B4C71EC6-210F-42DE-9C53-41977AD35B3D}" type="datetimeFigureOut">
               <a:rPr lang="ru-RU" smtClean="0"/>
-              <a:t>04.05.2024</a:t>
+              <a:t>17.10.2026</a:t>
             </a:fld>
             <a:endParaRPr lang="ru-RU"/>
           </a:p>
@@ -1951,7 +1951,7 @@
           <a:p>
             <a:fld id="{B4C71EC6-210F-42DE-9C53-41977AD35B3D}" type="datetimeFigureOut">
               <a:rPr lang="ru-RU" smtClean="0"/>
-              <a:t>04.05.2024</a:t>
+              <a:t>17.10.2026</a:t>
             </a:fld>
             <a:endParaRPr lang="ru-RU"/>
           </a:p>
@@ -2223,7 +2223,7 @@
           <a:p>
             <a:fld id="{B4C71EC6-210F-42DE-9C53-41977AD35B3D}" type="datetimeFigureOut">
               <a:rPr lang="ru-RU" smtClean="0"/>
-              <a:t>04.05.2024</a:t>
+              <a:t>17.10.2026</a:t>
             </a:fld>
             <a:endParaRPr lang="ru-RU"/>
           </a:p>
@@ -2471,7 +2471,7 @@
           <a:p>
             <a:fld id="{B4C71EC6-210F-42DE-9C53-41977AD35B3D}" type="datetimeFigureOut">
               <a:rPr lang="ru-RU" smtClean="0"/>
-              <a:t>04.05.2024</a:t>
+              <a:t>17.10.2026</a:t>
             </a:fld>
             <a:endParaRPr lang="ru-RU"/>
           </a:p>
@@ -2679,7 +2679,7 @@
           <a:p>
             <a:fld id="{B4C71EC6-210F-42DE-9C53-41977AD35B3D}" type="datetimeFigureOut">
               <a:rPr lang="ru-RU" smtClean="0"/>
-              <a:t>04.05.2024</a:t>
+              <a:t>17.10.2026</a:t>
             </a:fld>
             <a:endParaRPr lang="ru-RU"/>
           </a:p>
@@ -3065,26 +3065,74 @@
           <a:lstStyle/>
           <a:p>
             <a:r>
-              <a:rPr lang="ru-RU" dirty="0"/>
+              <a:rPr lang="ru-RU" dirty="0">
+                <a:effectLst>
+                  <a:outerShdw blurRad="38100" dist="38100" dir="2700000" algn="tl">
+                    <a:srgbClr val="000000">
+                      <a:alpha val="43137"/>
+                    </a:srgbClr>
+                  </a:outerShdw>
+                </a:effectLst>
+              </a:rPr>
               <a:t>Настройка </a:t>
             </a:r>
             <a:r>
-              <a:rPr lang="en-US" dirty="0" err="1" smtClean="0"/>
+              <a:rPr lang="en-US" dirty="0" err="1" smtClean="0">
+                <a:effectLst>
+                  <a:outerShdw blurRad="38100" dist="38100" dir="2700000" algn="tl">
+                    <a:srgbClr val="000000">
+                      <a:alpha val="43137"/>
+                    </a:srgbClr>
+                  </a:outerShdw>
+                </a:effectLst>
+              </a:rPr>
               <a:t>samba_client</a:t>
             </a:r>
             <a:r>
-              <a:rPr lang="en-US" dirty="0" smtClean="0"/>
+              <a:rPr lang="en-US" dirty="0" smtClean="0">
+                <a:effectLst>
+                  <a:outerShdw blurRad="38100" dist="38100" dir="2700000" algn="tl">
+                    <a:srgbClr val="000000">
+                      <a:alpha val="43137"/>
+                    </a:srgbClr>
+                  </a:outerShdw>
+                </a:effectLst>
+              </a:rPr>
               <a:t> </a:t>
             </a:r>
             <a:r>
-              <a:rPr lang="ru-RU" dirty="0" smtClean="0"/>
+              <a:rPr lang="ru-RU" dirty="0" smtClean="0">
+                <a:effectLst>
+                  <a:outerShdw blurRad="38100" dist="38100" dir="2700000" algn="tl">
+                    <a:srgbClr val="000000">
+                      <a:alpha val="43137"/>
+                    </a:srgbClr>
+                  </a:outerShdw>
+                </a:effectLst>
+              </a:rPr>
               <a:t>в </a:t>
             </a:r>
             <a:r>
-              <a:rPr lang="en-US" dirty="0" err="1" smtClean="0"/>
+              <a:rPr lang="en-US" dirty="0" err="1" smtClean="0">
+                <a:effectLst>
+                  <a:outerShdw blurRad="38100" dist="38100" dir="2700000" algn="tl">
+                    <a:srgbClr val="000000">
+                      <a:alpha val="43137"/>
+                    </a:srgbClr>
+                  </a:outerShdw>
+                </a:effectLst>
+              </a:rPr>
               <a:t>WindowsAD</a:t>
             </a:r>
-            <a:endParaRPr lang="ru-RU" dirty="0"/>
+            <a:endParaRPr lang="ru-RU" dirty="0">
+              <a:effectLst>
+                <a:outerShdw blurRad="38100" dist="38100" dir="2700000" algn="tl">
+                  <a:srgbClr val="000000">
+                    <a:alpha val="43137"/>
+                  </a:srgbClr>
+                </a:outerShdw>
+              </a:effectLst>
+            </a:endParaRPr>
           </a:p>
         </p:txBody>
       </p:sp>
